--- a/fixtures/sample-editor-layout-editing.pptx
+++ b/fixtures/sample-editor-layout-editing.pptx
@@ -767,7 +767,9 @@
       </p:grpSpPr>
       <p:sp>
         <p:nvSpPr>
-          <p:cNvPr id="160" name="目标母版标记"/>
+          <p:cNvPr id="160" name="目标母版标记">
+            <a:hlinkClick action="ppaction://hlinkshowjump?jump=lastslide"/>
+          </p:cNvPr>
           <p:cNvSpPr/>
           <p:nvPr/>
         </p:nvSpPr>
